--- a/ヤンの三日間企画書.pptx
+++ b/ヤンの三日間企画書.pptx
@@ -7,7 +7,9 @@
   <p:sldIdLst>
     <p:sldId id="257" r:id="rId2"/>
     <p:sldId id="258" r:id="rId3"/>
-    <p:sldId id="259" r:id="rId4"/>
+    <p:sldId id="262" r:id="rId4"/>
+    <p:sldId id="261" r:id="rId5"/>
+    <p:sldId id="259" r:id="rId6"/>
   </p:sldIdLst>
   <p:sldSz cx="12192000" cy="6858000"/>
   <p:notesSz cx="6858000" cy="9144000"/>
@@ -263,7 +265,7 @@
           <a:p>
             <a:fld id="{F7E09A1F-48C6-4CA3-A75D-2ABD9F98254B}" type="datetimeFigureOut">
               <a:rPr lang="en-US" smtClean="0"/>
-              <a:t>9/9/2026</a:t>
+              <a:t>9/15/2026</a:t>
             </a:fld>
             <a:endParaRPr lang="en-US"/>
           </a:p>
@@ -495,7 +497,7 @@
           <a:p>
             <a:fld id="{F7E09A1F-48C6-4CA3-A75D-2ABD9F98254B}" type="datetimeFigureOut">
               <a:rPr lang="en-US" smtClean="0"/>
-              <a:t>9/9/2026</a:t>
+              <a:t>9/15/2026</a:t>
             </a:fld>
             <a:endParaRPr lang="en-US"/>
           </a:p>
@@ -737,7 +739,7 @@
           <a:p>
             <a:fld id="{F7E09A1F-48C6-4CA3-A75D-2ABD9F98254B}" type="datetimeFigureOut">
               <a:rPr lang="en-US" smtClean="0"/>
-              <a:t>9/9/2026</a:t>
+              <a:t>9/15/2026</a:t>
             </a:fld>
             <a:endParaRPr lang="en-US"/>
           </a:p>
@@ -969,7 +971,7 @@
           <a:p>
             <a:fld id="{F7E09A1F-48C6-4CA3-A75D-2ABD9F98254B}" type="datetimeFigureOut">
               <a:rPr lang="en-US" smtClean="0"/>
-              <a:t>9/9/2026</a:t>
+              <a:t>9/15/2026</a:t>
             </a:fld>
             <a:endParaRPr lang="en-US"/>
           </a:p>
@@ -1245,7 +1247,7 @@
           <a:p>
             <a:fld id="{F7E09A1F-48C6-4CA3-A75D-2ABD9F98254B}" type="datetimeFigureOut">
               <a:rPr lang="en-US" smtClean="0"/>
-              <a:t>9/9/2026</a:t>
+              <a:t>9/15/2026</a:t>
             </a:fld>
             <a:endParaRPr lang="en-US"/>
           </a:p>
@@ -1577,7 +1579,7 @@
           <a:p>
             <a:fld id="{F7E09A1F-48C6-4CA3-A75D-2ABD9F98254B}" type="datetimeFigureOut">
               <a:rPr lang="en-US" smtClean="0"/>
-              <a:t>9/9/2026</a:t>
+              <a:t>9/15/2026</a:t>
             </a:fld>
             <a:endParaRPr lang="en-US"/>
           </a:p>
@@ -2056,7 +2058,7 @@
           <a:p>
             <a:fld id="{F7E09A1F-48C6-4CA3-A75D-2ABD9F98254B}" type="datetimeFigureOut">
               <a:rPr lang="en-US" smtClean="0"/>
-              <a:t>9/9/2026</a:t>
+              <a:t>9/15/2026</a:t>
             </a:fld>
             <a:endParaRPr lang="en-US"/>
           </a:p>
@@ -2198,7 +2200,7 @@
           <a:p>
             <a:fld id="{F7E09A1F-48C6-4CA3-A75D-2ABD9F98254B}" type="datetimeFigureOut">
               <a:rPr lang="en-US" smtClean="0"/>
-              <a:t>9/9/2026</a:t>
+              <a:t>9/15/2026</a:t>
             </a:fld>
             <a:endParaRPr lang="en-US"/>
           </a:p>
@@ -2311,7 +2313,7 @@
           <a:p>
             <a:fld id="{F7E09A1F-48C6-4CA3-A75D-2ABD9F98254B}" type="datetimeFigureOut">
               <a:rPr lang="en-US" smtClean="0"/>
-              <a:t>9/9/2026</a:t>
+              <a:t>9/15/2026</a:t>
             </a:fld>
             <a:endParaRPr lang="en-US"/>
           </a:p>
@@ -2656,7 +2658,7 @@
           <a:p>
             <a:fld id="{F7E09A1F-48C6-4CA3-A75D-2ABD9F98254B}" type="datetimeFigureOut">
               <a:rPr lang="en-US" smtClean="0"/>
-              <a:t>9/9/2026</a:t>
+              <a:t>9/15/2026</a:t>
             </a:fld>
             <a:endParaRPr lang="en-US"/>
           </a:p>
@@ -2945,7 +2947,7 @@
           <a:p>
             <a:fld id="{F7E09A1F-48C6-4CA3-A75D-2ABD9F98254B}" type="datetimeFigureOut">
               <a:rPr lang="en-US" smtClean="0"/>
-              <a:t>9/9/2026</a:t>
+              <a:t>9/15/2026</a:t>
             </a:fld>
             <a:endParaRPr lang="en-US"/>
           </a:p>
@@ -3220,7 +3222,7 @@
           <a:p>
             <a:fld id="{F7E09A1F-48C6-4CA3-A75D-2ABD9F98254B}" type="datetimeFigureOut">
               <a:rPr lang="en-US" smtClean="0"/>
-              <a:t>9/9/2026</a:t>
+              <a:t>9/15/2026</a:t>
             </a:fld>
             <a:endParaRPr lang="en-US"/>
           </a:p>
@@ -3763,6 +3765,7 @@
           <a:bodyPr/>
           <a:lstStyle/>
           <a:p>
+            <a:pPr algn="ctr"/>
             <a:r>
               <a:rPr lang="ja-JP" altLang="en-US" dirty="0"/>
               <a:t>ゲーム名</a:t>
@@ -3810,19 +3813,31 @@
             <a:pPr marL="0" indent="0">
               <a:buNone/>
             </a:pPr>
-            <a:r>
-              <a:rPr lang="ja-JP" altLang="en-US" dirty="0"/>
+            <a:endParaRPr lang="en-US" altLang="ja-JP" dirty="0"/>
+          </a:p>
+          <a:p>
+            <a:pPr marL="0" indent="0" algn="ctr">
+              <a:buNone/>
+            </a:pPr>
+            <a:endParaRPr lang="en-US" altLang="ja-JP" sz="4000" dirty="0"/>
+          </a:p>
+          <a:p>
+            <a:pPr marL="0" indent="0" algn="ctr">
+              <a:buNone/>
+            </a:pPr>
+            <a:r>
+              <a:rPr lang="ja-JP" altLang="en-US" sz="4000" dirty="0"/>
               <a:t>ジャンル：</a:t>
             </a:r>
             <a:r>
-              <a:rPr lang="en-US" dirty="0"/>
+              <a:rPr lang="en-US" sz="4000" dirty="0"/>
               <a:t>3D</a:t>
             </a:r>
             <a:r>
-              <a:rPr lang="ja-JP" altLang="en-US" dirty="0"/>
+              <a:rPr lang="ja-JP" altLang="en-US" sz="4000" dirty="0"/>
               <a:t>タワーディフェンス</a:t>
             </a:r>
-            <a:endParaRPr lang="en-US" altLang="ja-JP" dirty="0"/>
+            <a:endParaRPr lang="en-US" altLang="ja-JP" sz="4000" dirty="0"/>
           </a:p>
           <a:p>
             <a:pPr marL="0" indent="0">
@@ -3831,76 +3846,35 @@
             <a:endParaRPr lang="en-US" altLang="ja-JP" dirty="0"/>
           </a:p>
           <a:p>
-            <a:pPr marL="0" indent="0">
+            <a:pPr marL="0" indent="0" algn="ctr">
               <a:buNone/>
             </a:pPr>
             <a:r>
-              <a:rPr lang="ja-JP" altLang="en-US" dirty="0"/>
-              <a:t>砂漠の真ん中に埋まっている男「ヤン」</a:t>
-            </a:r>
-            <a:endParaRPr lang="en-US" altLang="ja-JP" dirty="0"/>
-          </a:p>
-          <a:p>
-            <a:pPr marL="0" indent="0">
+              <a:rPr lang="ja-JP" altLang="en-US" sz="4000" dirty="0"/>
+              <a:t>プラットフォーム：</a:t>
+            </a:r>
+            <a:r>
+              <a:rPr lang="en-US" altLang="ja-JP" sz="4000" dirty="0"/>
+              <a:t>PC</a:t>
+            </a:r>
+          </a:p>
+          <a:p>
+            <a:pPr marL="0" indent="0" algn="ctr">
               <a:buNone/>
             </a:pPr>
-            <a:r>
-              <a:rPr lang="ja-JP" altLang="en-US" dirty="0"/>
-              <a:t>プレイヤーはヤンを操作し救助が来るまでの三日間を耐える</a:t>
-            </a:r>
-            <a:endParaRPr lang="en-US" altLang="ja-JP" dirty="0"/>
-          </a:p>
-          <a:p>
-            <a:pPr marL="0" indent="0">
+            <a:endParaRPr lang="en-US" altLang="ja-JP" sz="4000" dirty="0"/>
+          </a:p>
+          <a:p>
+            <a:pPr marL="0" indent="0" algn="ctr">
               <a:buNone/>
             </a:pPr>
             <a:r>
-              <a:rPr lang="ja-JP" altLang="en-US" dirty="0"/>
-              <a:t>昼の状態と夜の状態で出てくる敵を変える</a:t>
-            </a:r>
-            <a:endParaRPr lang="en-US" altLang="ja-JP" dirty="0"/>
-          </a:p>
-          <a:p>
-            <a:pPr marL="0" indent="0">
-              <a:buNone/>
-            </a:pPr>
-            <a:endParaRPr lang="en-US" altLang="ja-JP" dirty="0"/>
-          </a:p>
-          <a:p>
-            <a:pPr marL="0" indent="0">
-              <a:buNone/>
-            </a:pPr>
-            <a:r>
-              <a:rPr lang="ja-JP" altLang="en-US" dirty="0"/>
-              <a:t>「埋まっているヤン編」</a:t>
-            </a:r>
-            <a:endParaRPr lang="en-US" altLang="ja-JP" dirty="0"/>
-          </a:p>
-          <a:p>
-            <a:pPr marL="0" indent="0">
-              <a:buNone/>
-            </a:pPr>
-            <a:r>
-              <a:rPr lang="ja-JP" altLang="en-US" dirty="0"/>
-              <a:t>プレイヤーは埋まった状態でカメラ方向だけ移動可能</a:t>
-            </a:r>
-            <a:endParaRPr lang="en-US" altLang="ja-JP" dirty="0"/>
-          </a:p>
-          <a:p>
-            <a:pPr marL="0" indent="0">
-              <a:buNone/>
-            </a:pPr>
-            <a:r>
-              <a:rPr lang="en-US" altLang="ja-JP" dirty="0"/>
-              <a:t>(</a:t>
-            </a:r>
-            <a:r>
-              <a:rPr lang="ja-JP" altLang="en-US" dirty="0"/>
-              <a:t>後々時間に余裕がある場合「出てるヤン編を制作する」。</a:t>
-            </a:r>
-            <a:r>
-              <a:rPr lang="en-US" altLang="ja-JP" dirty="0"/>
-              <a:t>)</a:t>
+              <a:rPr lang="ja-JP" altLang="en-US" sz="4000" dirty="0"/>
+              <a:t>ゲームエンジン：</a:t>
+            </a:r>
+            <a:r>
+              <a:rPr lang="en-US" altLang="ja-JP" sz="4000" dirty="0"/>
+              <a:t>Unity</a:t>
             </a:r>
           </a:p>
         </p:txBody>
@@ -3940,7 +3914,7 @@
           <p:cNvPr id="2" name="タイトル 1">
             <a:extLst>
               <a:ext uri="{FF2B5EF4-FFF2-40B4-BE49-F238E27FC236}">
-                <a16:creationId xmlns:a16="http://schemas.microsoft.com/office/drawing/2014/main" id="{2E0A908A-BC7B-DC71-2E75-FA75455642BC}"/>
+                <a16:creationId xmlns:a16="http://schemas.microsoft.com/office/drawing/2014/main" id="{F6FB9634-0E07-0CC3-7252-30577897BE34}"/>
               </a:ext>
             </a:extLst>
           </p:cNvPr>
@@ -3951,18 +3925,137 @@
             <p:ph type="title"/>
           </p:nvPr>
         </p:nvSpPr>
+        <p:spPr/>
+        <p:txBody>
+          <a:bodyPr/>
+          <a:lstStyle/>
+          <a:p>
+            <a:pPr algn="ctr"/>
+            <a:r>
+              <a:rPr kumimoji="1" lang="ja-JP" altLang="en-US" dirty="0"/>
+              <a:t>コンセプト</a:t>
+            </a:r>
+          </a:p>
+        </p:txBody>
+      </p:sp>
+      <p:sp>
+        <p:nvSpPr>
+          <p:cNvPr id="3" name="コンテンツ プレースホルダー 2">
+            <a:extLst>
+              <a:ext uri="{FF2B5EF4-FFF2-40B4-BE49-F238E27FC236}">
+                <a16:creationId xmlns:a16="http://schemas.microsoft.com/office/drawing/2014/main" id="{C878CBFF-5809-1383-C7FF-ABA814A4EBA5}"/>
+              </a:ext>
+            </a:extLst>
+          </p:cNvPr>
+          <p:cNvSpPr>
+            <a:spLocks noGrp="1"/>
+          </p:cNvSpPr>
+          <p:nvPr>
+            <p:ph idx="1"/>
+          </p:nvPr>
+        </p:nvSpPr>
         <p:spPr>
-          <a:xfrm flipV="1">
-            <a:off x="838200" y="-5775158"/>
-            <a:ext cx="10515600" cy="272717"/>
+          <a:xfrm>
+            <a:off x="838200" y="2695074"/>
+            <a:ext cx="10515600" cy="1491915"/>
           </a:xfrm>
         </p:spPr>
         <p:txBody>
           <a:bodyPr>
-            <a:normAutofit fontScale="90000"/>
+            <a:noAutofit/>
           </a:bodyPr>
           <a:lstStyle/>
           <a:p>
+            <a:pPr marL="0" indent="0" algn="ctr">
+              <a:buNone/>
+            </a:pPr>
+            <a:r>
+              <a:rPr kumimoji="1" lang="ja-JP" altLang="en-US" sz="9600" dirty="0">
+                <a:solidFill>
+                  <a:srgbClr val="FF0000"/>
+                </a:solidFill>
+              </a:rPr>
+              <a:t>緊張感</a:t>
+            </a:r>
+            <a:r>
+              <a:rPr kumimoji="1" lang="ja-JP" altLang="en-US" sz="6600" dirty="0"/>
+              <a:t>と</a:t>
+            </a:r>
+            <a:r>
+              <a:rPr kumimoji="1" lang="ja-JP" altLang="en-US" sz="9600" dirty="0">
+                <a:solidFill>
+                  <a:schemeClr val="accent1">
+                    <a:lumMod val="60000"/>
+                    <a:lumOff val="40000"/>
+                  </a:schemeClr>
+                </a:solidFill>
+              </a:rPr>
+              <a:t>達成感</a:t>
+            </a:r>
+          </a:p>
+        </p:txBody>
+      </p:sp>
+    </p:spTree>
+    <p:extLst>
+      <p:ext uri="{BB962C8B-B14F-4D97-AF65-F5344CB8AC3E}">
+        <p14:creationId xmlns:p14="http://schemas.microsoft.com/office/powerpoint/2010/main" val="1598347380"/>
+      </p:ext>
+    </p:extLst>
+  </p:cSld>
+  <p:clrMapOvr>
+    <a:masterClrMapping/>
+  </p:clrMapOvr>
+</p:sld>
+</file>
+
+<file path=ppt/slides/slide4.xml><?xml version="1.0" encoding="utf-8"?>
+<p:sld xmlns:a="http://schemas.openxmlformats.org/drawingml/2006/main" xmlns:r="http://schemas.openxmlformats.org/officeDocument/2006/relationships" xmlns:p="http://schemas.openxmlformats.org/presentationml/2006/main">
+  <p:cSld>
+    <p:spTree>
+      <p:nvGrpSpPr>
+        <p:cNvPr id="1" name="">
+          <a:extLst>
+            <a:ext uri="{FF2B5EF4-FFF2-40B4-BE49-F238E27FC236}">
+              <a16:creationId xmlns:a16="http://schemas.microsoft.com/office/drawing/2014/main" id="{A3D3853A-3E00-E524-2E3E-8CA562B6B765}"/>
+            </a:ext>
+          </a:extLst>
+        </p:cNvPr>
+        <p:cNvGrpSpPr/>
+        <p:nvPr/>
+      </p:nvGrpSpPr>
+      <p:grpSpPr>
+        <a:xfrm>
+          <a:off x="0" y="0"/>
+          <a:ext cx="0" cy="0"/>
+          <a:chOff x="0" y="0"/>
+          <a:chExt cx="0" cy="0"/>
+        </a:xfrm>
+      </p:grpSpPr>
+      <p:sp>
+        <p:nvSpPr>
+          <p:cNvPr id="2" name="タイトル 1">
+            <a:extLst>
+              <a:ext uri="{FF2B5EF4-FFF2-40B4-BE49-F238E27FC236}">
+                <a16:creationId xmlns:a16="http://schemas.microsoft.com/office/drawing/2014/main" id="{06C72B4E-DEE9-AE0B-EE4B-DB154B767500}"/>
+              </a:ext>
+            </a:extLst>
+          </p:cNvPr>
+          <p:cNvSpPr>
+            <a:spLocks noGrp="1"/>
+          </p:cNvSpPr>
+          <p:nvPr>
+            <p:ph type="title"/>
+          </p:nvPr>
+        </p:nvSpPr>
+        <p:spPr/>
+        <p:txBody>
+          <a:bodyPr/>
+          <a:lstStyle/>
+          <a:p>
+            <a:r>
+              <a:rPr lang="ja-JP" altLang="en-US" dirty="0"/>
+              <a:t>ゲーム</a:t>
+            </a:r>
             <a:endParaRPr lang="en-US" dirty="0"/>
           </a:p>
         </p:txBody>
@@ -3972,7 +4065,7 @@
           <p:cNvPr id="3" name="コンテンツ プレースホルダー 2">
             <a:extLst>
               <a:ext uri="{FF2B5EF4-FFF2-40B4-BE49-F238E27FC236}">
-                <a16:creationId xmlns:a16="http://schemas.microsoft.com/office/drawing/2014/main" id="{AEA2783C-1E6B-F1FF-413B-958768C99EB8}"/>
+                <a16:creationId xmlns:a16="http://schemas.microsoft.com/office/drawing/2014/main" id="{3C691BA5-6538-4075-7663-30B5CFCD348C}"/>
               </a:ext>
             </a:extLst>
           </p:cNvPr>
@@ -3985,7 +4078,135 @@
         </p:nvSpPr>
         <p:spPr>
           <a:xfrm>
-            <a:off x="838200" y="561474"/>
+            <a:off x="838200" y="1363578"/>
+            <a:ext cx="10515600" cy="5277853"/>
+          </a:xfrm>
+        </p:spPr>
+        <p:txBody>
+          <a:bodyPr>
+            <a:normAutofit/>
+          </a:bodyPr>
+          <a:lstStyle/>
+          <a:p>
+            <a:pPr marL="0" indent="0">
+              <a:buNone/>
+            </a:pPr>
+            <a:endParaRPr lang="en-US" altLang="ja-JP" dirty="0"/>
+          </a:p>
+          <a:p>
+            <a:pPr marL="0" indent="0">
+              <a:buNone/>
+            </a:pPr>
+            <a:r>
+              <a:rPr lang="ja-JP" altLang="en-US" dirty="0"/>
+              <a:t>砂漠の真ん中に埋まっている男「ヤン」</a:t>
+            </a:r>
+            <a:endParaRPr lang="en-US" altLang="ja-JP" dirty="0"/>
+          </a:p>
+          <a:p>
+            <a:pPr marL="0" indent="0">
+              <a:buNone/>
+            </a:pPr>
+            <a:r>
+              <a:rPr lang="ja-JP" altLang="en-US" dirty="0"/>
+              <a:t>ヤンを襲おうとする敵を倒し、救助が来るまでの三日間耐える。</a:t>
+            </a:r>
+            <a:endParaRPr lang="en-US" altLang="ja-JP" dirty="0"/>
+          </a:p>
+          <a:p>
+            <a:pPr marL="0" indent="0">
+              <a:buNone/>
+            </a:pPr>
+            <a:endParaRPr lang="en-US" altLang="ja-JP" dirty="0"/>
+          </a:p>
+          <a:p>
+            <a:pPr marL="0" indent="0">
+              <a:buNone/>
+            </a:pPr>
+            <a:r>
+              <a:rPr lang="ja-JP" altLang="en-US" dirty="0"/>
+              <a:t>「埋まっているヤン編」</a:t>
+            </a:r>
+            <a:endParaRPr lang="en-US" altLang="ja-JP" dirty="0"/>
+          </a:p>
+          <a:p>
+            <a:pPr marL="0" indent="0">
+              <a:buNone/>
+            </a:pPr>
+            <a:r>
+              <a:rPr lang="ja-JP" altLang="en-US" dirty="0"/>
+              <a:t>プレイヤーは埋まった状態でカメラ方向だけ移動可能</a:t>
+            </a:r>
+            <a:endParaRPr lang="en-US" altLang="ja-JP" dirty="0"/>
+          </a:p>
+          <a:p>
+            <a:pPr marL="0" indent="0">
+              <a:buNone/>
+            </a:pPr>
+            <a:r>
+              <a:rPr lang="en-US" altLang="ja-JP" dirty="0"/>
+              <a:t>(</a:t>
+            </a:r>
+            <a:r>
+              <a:rPr lang="ja-JP" altLang="en-US" dirty="0"/>
+              <a:t>後々時間に余裕がある場合「出てるヤン編を制作する」。</a:t>
+            </a:r>
+            <a:r>
+              <a:rPr lang="en-US" altLang="ja-JP" dirty="0"/>
+              <a:t>)</a:t>
+            </a:r>
+          </a:p>
+        </p:txBody>
+      </p:sp>
+    </p:spTree>
+    <p:extLst>
+      <p:ext uri="{BB962C8B-B14F-4D97-AF65-F5344CB8AC3E}">
+        <p14:creationId xmlns:p14="http://schemas.microsoft.com/office/powerpoint/2010/main" val="1252532744"/>
+      </p:ext>
+    </p:extLst>
+  </p:cSld>
+  <p:clrMapOvr>
+    <a:masterClrMapping/>
+  </p:clrMapOvr>
+</p:sld>
+</file>
+
+<file path=ppt/slides/slide5.xml><?xml version="1.0" encoding="utf-8"?>
+<p:sld xmlns:a="http://schemas.openxmlformats.org/drawingml/2006/main" xmlns:r="http://schemas.openxmlformats.org/officeDocument/2006/relationships" xmlns:p="http://schemas.openxmlformats.org/presentationml/2006/main">
+  <p:cSld>
+    <p:spTree>
+      <p:nvGrpSpPr>
+        <p:cNvPr id="1" name=""/>
+        <p:cNvGrpSpPr/>
+        <p:nvPr/>
+      </p:nvGrpSpPr>
+      <p:grpSpPr>
+        <a:xfrm>
+          <a:off x="0" y="0"/>
+          <a:ext cx="0" cy="0"/>
+          <a:chOff x="0" y="0"/>
+          <a:chExt cx="0" cy="0"/>
+        </a:xfrm>
+      </p:grpSpPr>
+      <p:sp>
+        <p:nvSpPr>
+          <p:cNvPr id="3" name="コンテンツ プレースホルダー 2">
+            <a:extLst>
+              <a:ext uri="{FF2B5EF4-FFF2-40B4-BE49-F238E27FC236}">
+                <a16:creationId xmlns:a16="http://schemas.microsoft.com/office/drawing/2014/main" id="{AEA2783C-1E6B-F1FF-413B-958768C99EB8}"/>
+              </a:ext>
+            </a:extLst>
+          </p:cNvPr>
+          <p:cNvSpPr>
+            <a:spLocks noGrp="1"/>
+          </p:cNvSpPr>
+          <p:nvPr>
+            <p:ph idx="1"/>
+          </p:nvPr>
+        </p:nvSpPr>
+        <p:spPr>
+          <a:xfrm>
+            <a:off x="838200" y="621255"/>
             <a:ext cx="10515600" cy="5615489"/>
           </a:xfrm>
         </p:spPr>
@@ -3998,182 +4219,140 @@
             <a:pPr marL="0" indent="0">
               <a:buNone/>
             </a:pPr>
+            <a:endParaRPr lang="en-US" altLang="ja-JP" dirty="0"/>
+          </a:p>
+          <a:p>
+            <a:pPr marL="0" indent="0">
+              <a:buNone/>
+            </a:pPr>
+            <a:endParaRPr lang="en-US" altLang="ja-JP" dirty="0"/>
+          </a:p>
+          <a:p>
+            <a:pPr marL="0" indent="0">
+              <a:buNone/>
+            </a:pPr>
+            <a:r>
+              <a:rPr lang="ja-JP" altLang="en-US" dirty="0"/>
+              <a:t>三日間生きながらえて救助を待つ、耐えて救助されたらクリア</a:t>
+            </a:r>
+            <a:endParaRPr lang="en-US" altLang="ja-JP" dirty="0"/>
+          </a:p>
+          <a:p>
+            <a:pPr marL="0" indent="0">
+              <a:buNone/>
+            </a:pPr>
+            <a:r>
+              <a:rPr lang="ja-JP" altLang="en-US" dirty="0"/>
+              <a:t>三日間耐えられず死んでしまったらゲームオーバー</a:t>
+            </a:r>
+            <a:endParaRPr lang="en-US" altLang="ja-JP" dirty="0"/>
+          </a:p>
+          <a:p>
+            <a:pPr marL="0" indent="0">
+              <a:buNone/>
+            </a:pPr>
+            <a:r>
+              <a:rPr lang="ja-JP" altLang="en-US" dirty="0"/>
+              <a:t>敵から攻撃を受けないように倒していく</a:t>
+            </a:r>
+            <a:r>
+              <a:rPr lang="en-US" altLang="ja-JP" dirty="0"/>
+              <a:t>(</a:t>
+            </a:r>
+            <a:r>
+              <a:rPr lang="ja-JP" altLang="en-US" dirty="0"/>
+              <a:t>アイテムを実装して水ゲージを追加するかも</a:t>
+            </a:r>
+            <a:r>
+              <a:rPr lang="en-US" altLang="ja-JP" dirty="0"/>
+              <a:t>)</a:t>
+            </a:r>
+          </a:p>
+          <a:p>
+            <a:pPr marL="0" indent="0">
+              <a:buNone/>
+            </a:pPr>
+            <a:r>
+              <a:rPr lang="ja-JP" altLang="en-US" dirty="0"/>
+              <a:t>昼の状態と夜の状態で出てくる敵を変える</a:t>
+            </a:r>
+            <a:endParaRPr lang="en-US" altLang="ja-JP" dirty="0"/>
+          </a:p>
+          <a:p>
+            <a:pPr marL="0" indent="0">
+              <a:buNone/>
+            </a:pPr>
+            <a:endParaRPr lang="en-US" altLang="ja-JP" dirty="0"/>
+          </a:p>
+          <a:p>
+            <a:pPr marL="0" indent="0">
+              <a:buNone/>
+            </a:pPr>
+            <a:r>
+              <a:rPr lang="ja-JP" altLang="en-US" dirty="0"/>
+              <a:t>カメラは一人称</a:t>
+            </a:r>
+            <a:r>
+              <a:rPr lang="en-US" altLang="ja-JP" dirty="0"/>
+              <a:t>(</a:t>
+            </a:r>
+            <a:r>
+              <a:rPr lang="ja-JP" altLang="en-US" dirty="0"/>
+              <a:t>画面にはプレイヤーの手だけ映る状態</a:t>
+            </a:r>
+            <a:r>
+              <a:rPr lang="en-US" altLang="ja-JP" dirty="0"/>
+              <a:t>)</a:t>
+            </a:r>
+          </a:p>
+          <a:p>
+            <a:pPr marL="0" indent="0">
+              <a:buNone/>
+            </a:pPr>
+            <a:r>
+              <a:rPr lang="ja-JP" altLang="en-US" dirty="0"/>
+              <a:t>プレイヤーの攻撃は投擲物</a:t>
+            </a:r>
+            <a:r>
+              <a:rPr lang="en-US" altLang="ja-JP" dirty="0"/>
+              <a:t>(</a:t>
+            </a:r>
+            <a:r>
+              <a:rPr lang="ja-JP" altLang="en-US" dirty="0"/>
+              <a:t>中～長距離武器</a:t>
+            </a:r>
+            <a:r>
+              <a:rPr lang="en-US" altLang="ja-JP" dirty="0"/>
+              <a:t>)</a:t>
+            </a:r>
+          </a:p>
+        </p:txBody>
+      </p:sp>
+      <p:sp>
+        <p:nvSpPr>
+          <p:cNvPr id="5" name="タイトル 4">
+            <a:extLst>
+              <a:ext uri="{FF2B5EF4-FFF2-40B4-BE49-F238E27FC236}">
+                <a16:creationId xmlns:a16="http://schemas.microsoft.com/office/drawing/2014/main" id="{50351E75-4E68-8F42-730F-9E9196EA2983}"/>
+              </a:ext>
+            </a:extLst>
+          </p:cNvPr>
+          <p:cNvSpPr>
+            <a:spLocks noGrp="1"/>
+          </p:cNvSpPr>
+          <p:nvPr>
+            <p:ph type="title"/>
+          </p:nvPr>
+        </p:nvSpPr>
+        <p:spPr/>
+        <p:txBody>
+          <a:bodyPr/>
+          <a:lstStyle/>
+          <a:p>
             <a:r>
               <a:rPr lang="ja-JP" altLang="en-US" dirty="0"/>
               <a:t>仕様</a:t>
             </a:r>
-            <a:endParaRPr lang="en-US" altLang="ja-JP" dirty="0"/>
-          </a:p>
-          <a:p>
-            <a:pPr marL="0" indent="0">
-              <a:buNone/>
-            </a:pPr>
-            <a:r>
-              <a:rPr lang="ja-JP" altLang="en-US" dirty="0"/>
-              <a:t>三日間生きながらえて救助を待つ、耐えて救助されたらクリア</a:t>
-            </a:r>
-            <a:endParaRPr lang="en-US" altLang="ja-JP" dirty="0"/>
-          </a:p>
-          <a:p>
-            <a:pPr marL="0" indent="0">
-              <a:buNone/>
-            </a:pPr>
-            <a:r>
-              <a:rPr lang="ja-JP" altLang="en-US" dirty="0"/>
-              <a:t>三日間耐えられず死んでしまったらゲームオーバー</a:t>
-            </a:r>
-            <a:endParaRPr lang="en-US" altLang="ja-JP" dirty="0"/>
-          </a:p>
-          <a:p>
-            <a:pPr marL="0" indent="0">
-              <a:buNone/>
-            </a:pPr>
-            <a:r>
-              <a:rPr lang="ja-JP" altLang="en-US" dirty="0"/>
-              <a:t>敵から攻撃を受けないように倒していく</a:t>
-            </a:r>
-            <a:r>
-              <a:rPr lang="en-US" altLang="ja-JP" dirty="0"/>
-              <a:t>(</a:t>
-            </a:r>
-            <a:r>
-              <a:rPr lang="ja-JP" altLang="en-US" dirty="0"/>
-              <a:t>アイテムを実装して水ゲージを追加するかも</a:t>
-            </a:r>
-            <a:r>
-              <a:rPr lang="en-US" altLang="ja-JP" dirty="0"/>
-              <a:t>)</a:t>
-            </a:r>
-          </a:p>
-          <a:p>
-            <a:pPr marL="0" indent="0">
-              <a:buNone/>
-            </a:pPr>
-            <a:endParaRPr lang="en-US" altLang="ja-JP" dirty="0"/>
-          </a:p>
-          <a:p>
-            <a:pPr marL="0" indent="0">
-              <a:buNone/>
-            </a:pPr>
-            <a:r>
-              <a:rPr lang="ja-JP" altLang="en-US" dirty="0"/>
-              <a:t>カメラは一人称</a:t>
-            </a:r>
-            <a:r>
-              <a:rPr lang="en-US" altLang="ja-JP" dirty="0"/>
-              <a:t>(</a:t>
-            </a:r>
-            <a:r>
-              <a:rPr lang="ja-JP" altLang="en-US" dirty="0"/>
-              <a:t>画面にはプレイヤーの手だけ映る状態</a:t>
-            </a:r>
-            <a:r>
-              <a:rPr lang="en-US" altLang="ja-JP" dirty="0"/>
-              <a:t>)</a:t>
-            </a:r>
-          </a:p>
-          <a:p>
-            <a:pPr marL="0" indent="0">
-              <a:buNone/>
-            </a:pPr>
-            <a:r>
-              <a:rPr lang="ja-JP" altLang="en-US" dirty="0"/>
-              <a:t>プレイヤーの攻撃は投擲物</a:t>
-            </a:r>
-            <a:r>
-              <a:rPr lang="en-US" altLang="ja-JP" dirty="0"/>
-              <a:t>(</a:t>
-            </a:r>
-            <a:r>
-              <a:rPr lang="ja-JP" altLang="en-US" dirty="0"/>
-              <a:t>中～長距離武器</a:t>
-            </a:r>
-            <a:r>
-              <a:rPr lang="en-US" altLang="ja-JP" dirty="0"/>
-              <a:t>)</a:t>
-            </a:r>
-          </a:p>
-          <a:p>
-            <a:pPr marL="0" indent="0">
-              <a:buNone/>
-            </a:pPr>
-            <a:r>
-              <a:rPr lang="ja-JP" altLang="en-US" dirty="0"/>
-              <a:t>操作はコントローラー</a:t>
-            </a:r>
-            <a:endParaRPr lang="en-US" altLang="ja-JP" dirty="0"/>
-          </a:p>
-          <a:p>
-            <a:pPr marL="0" indent="0">
-              <a:buNone/>
-            </a:pPr>
-            <a:r>
-              <a:rPr lang="ja-JP" altLang="en-US" dirty="0"/>
-              <a:t>左スティック</a:t>
-            </a:r>
-            <a:r>
-              <a:rPr lang="en-US" altLang="ja-JP" dirty="0"/>
-              <a:t>:</a:t>
-            </a:r>
-            <a:r>
-              <a:rPr lang="ja-JP" altLang="en-US" dirty="0"/>
-              <a:t>移動</a:t>
-            </a:r>
-            <a:r>
-              <a:rPr lang="en-US" altLang="ja-JP" dirty="0"/>
-              <a:t>(</a:t>
-            </a:r>
-            <a:r>
-              <a:rPr lang="ja-JP" altLang="en-US" dirty="0"/>
-              <a:t>不確定</a:t>
-            </a:r>
-            <a:r>
-              <a:rPr lang="en-US" altLang="ja-JP" dirty="0"/>
-              <a:t>)</a:t>
-            </a:r>
-            <a:r>
-              <a:rPr lang="ja-JP" altLang="en-US" dirty="0"/>
-              <a:t>　右スティック</a:t>
-            </a:r>
-            <a:r>
-              <a:rPr lang="en-US" altLang="ja-JP" dirty="0"/>
-              <a:t>:</a:t>
-            </a:r>
-            <a:r>
-              <a:rPr lang="ja-JP" altLang="en-US" dirty="0"/>
-              <a:t>カメラ移動</a:t>
-            </a:r>
-            <a:endParaRPr lang="en-US" altLang="ja-JP" dirty="0"/>
-          </a:p>
-          <a:p>
-            <a:pPr marL="0" indent="0">
-              <a:buNone/>
-            </a:pPr>
-            <a:r>
-              <a:rPr lang="en-US" altLang="ja-JP" dirty="0"/>
-              <a:t>A:</a:t>
-            </a:r>
-            <a:r>
-              <a:rPr lang="ja-JP" altLang="en-US" dirty="0"/>
-              <a:t>決定　</a:t>
-            </a:r>
-            <a:r>
-              <a:rPr lang="en-US" altLang="ja-JP" dirty="0"/>
-              <a:t>RT:</a:t>
-            </a:r>
-            <a:r>
-              <a:rPr lang="ja-JP" altLang="en-US" dirty="0"/>
-              <a:t>攻撃　</a:t>
-            </a:r>
-            <a:r>
-              <a:rPr lang="en-US" altLang="ja-JP" dirty="0"/>
-              <a:t>LB&amp;RB:</a:t>
-            </a:r>
-            <a:r>
-              <a:rPr lang="ja-JP" altLang="en-US" dirty="0"/>
-              <a:t>カーソル移動</a:t>
-            </a:r>
-            <a:endParaRPr lang="en-US" altLang="ja-JP" dirty="0"/>
           </a:p>
         </p:txBody>
       </p:sp>

--- a/ヤンの三日間企画書.pptx
+++ b/ヤンの三日間企画書.pptx
@@ -4255,27 +4255,6 @@
               <a:rPr lang="ja-JP" altLang="en-US" dirty="0"/>
               <a:t>敵から攻撃を受けないように倒していく</a:t>
             </a:r>
-            <a:r>
-              <a:rPr lang="en-US" altLang="ja-JP" dirty="0"/>
-              <a:t>(</a:t>
-            </a:r>
-            <a:r>
-              <a:rPr lang="ja-JP" altLang="en-US" dirty="0"/>
-              <a:t>アイテムを実装して水ゲージを追加するかも</a:t>
-            </a:r>
-            <a:r>
-              <a:rPr lang="en-US" altLang="ja-JP" dirty="0"/>
-              <a:t>)</a:t>
-            </a:r>
-          </a:p>
-          <a:p>
-            <a:pPr marL="0" indent="0">
-              <a:buNone/>
-            </a:pPr>
-            <a:r>
-              <a:rPr lang="ja-JP" altLang="en-US" dirty="0"/>
-              <a:t>昼の状態と夜の状態で出てくる敵を変える</a:t>
-            </a:r>
             <a:endParaRPr lang="en-US" altLang="ja-JP" dirty="0"/>
           </a:p>
           <a:p>
@@ -4292,39 +4271,17 @@
               <a:rPr lang="ja-JP" altLang="en-US" dirty="0"/>
               <a:t>カメラは一人称</a:t>
             </a:r>
-            <a:r>
-              <a:rPr lang="en-US" altLang="ja-JP" dirty="0"/>
-              <a:t>(</a:t>
-            </a:r>
+            <a:endParaRPr lang="en-US" altLang="ja-JP" dirty="0"/>
+          </a:p>
+          <a:p>
+            <a:pPr marL="0" indent="0">
+              <a:buNone/>
+            </a:pPr>
             <a:r>
               <a:rPr lang="ja-JP" altLang="en-US" dirty="0"/>
-              <a:t>画面にはプレイヤーの手だけ映る状態</a:t>
-            </a:r>
-            <a:r>
-              <a:rPr lang="en-US" altLang="ja-JP" dirty="0"/>
-              <a:t>)</a:t>
-            </a:r>
-          </a:p>
-          <a:p>
-            <a:pPr marL="0" indent="0">
-              <a:buNone/>
-            </a:pPr>
-            <a:r>
-              <a:rPr lang="ja-JP" altLang="en-US" dirty="0"/>
-              <a:t>プレイヤーの攻撃は投擲物</a:t>
-            </a:r>
-            <a:r>
-              <a:rPr lang="en-US" altLang="ja-JP" dirty="0"/>
-              <a:t>(</a:t>
-            </a:r>
-            <a:r>
-              <a:rPr lang="ja-JP" altLang="en-US" dirty="0"/>
-              <a:t>中～長距離武器</a:t>
-            </a:r>
-            <a:r>
-              <a:rPr lang="en-US" altLang="ja-JP" dirty="0"/>
-              <a:t>)</a:t>
-            </a:r>
+              <a:t>プレイヤーの攻撃は銃（弾数は無制限）</a:t>
+            </a:r>
+            <a:endParaRPr lang="en-US" altLang="ja-JP" dirty="0"/>
           </a:p>
         </p:txBody>
       </p:sp>
@@ -4356,6 +4313,36 @@
           </a:p>
         </p:txBody>
       </p:sp>
+      <p:pic>
+        <p:nvPicPr>
+          <p:cNvPr id="2" name="図 1" descr="スクリーンショット #29">
+            <a:extLst>
+              <a:ext uri="{FF2B5EF4-FFF2-40B4-BE49-F238E27FC236}">
+                <a16:creationId xmlns:a16="http://schemas.microsoft.com/office/drawing/2014/main" id="{BCFAD933-1487-420B-D0A2-19F9A0969114}"/>
+              </a:ext>
+            </a:extLst>
+          </p:cNvPr>
+          <p:cNvPicPr>
+            <a:picLocks noChangeAspect="1"/>
+          </p:cNvPicPr>
+          <p:nvPr/>
+        </p:nvPicPr>
+        <p:blipFill>
+          <a:blip r:embed="rId2"/>
+          <a:stretch>
+            <a:fillRect/>
+          </a:stretch>
+        </p:blipFill>
+        <p:spPr>
+          <a:xfrm>
+            <a:off x="7324436" y="3587750"/>
+            <a:ext cx="4368800" cy="2457450"/>
+          </a:xfrm>
+          <a:prstGeom prst="rect">
+            <a:avLst/>
+          </a:prstGeom>
+        </p:spPr>
+      </p:pic>
     </p:spTree>
     <p:extLst>
       <p:ext uri="{BB962C8B-B14F-4D97-AF65-F5344CB8AC3E}">

--- a/ヤンの三日間企画書.pptx
+++ b/ヤンの三日間企画書.pptx
@@ -265,7 +265,7 @@
           <a:p>
             <a:fld id="{F7E09A1F-48C6-4CA3-A75D-2ABD9F98254B}" type="datetimeFigureOut">
               <a:rPr lang="en-US" smtClean="0"/>
-              <a:t>9/15/2026</a:t>
+              <a:t>9/16/2026</a:t>
             </a:fld>
             <a:endParaRPr lang="en-US"/>
           </a:p>
@@ -497,7 +497,7 @@
           <a:p>
             <a:fld id="{F7E09A1F-48C6-4CA3-A75D-2ABD9F98254B}" type="datetimeFigureOut">
               <a:rPr lang="en-US" smtClean="0"/>
-              <a:t>9/15/2026</a:t>
+              <a:t>9/16/2026</a:t>
             </a:fld>
             <a:endParaRPr lang="en-US"/>
           </a:p>
@@ -739,7 +739,7 @@
           <a:p>
             <a:fld id="{F7E09A1F-48C6-4CA3-A75D-2ABD9F98254B}" type="datetimeFigureOut">
               <a:rPr lang="en-US" smtClean="0"/>
-              <a:t>9/15/2026</a:t>
+              <a:t>9/16/2026</a:t>
             </a:fld>
             <a:endParaRPr lang="en-US"/>
           </a:p>
@@ -971,7 +971,7 @@
           <a:p>
             <a:fld id="{F7E09A1F-48C6-4CA3-A75D-2ABD9F98254B}" type="datetimeFigureOut">
               <a:rPr lang="en-US" smtClean="0"/>
-              <a:t>9/15/2026</a:t>
+              <a:t>9/16/2026</a:t>
             </a:fld>
             <a:endParaRPr lang="en-US"/>
           </a:p>
@@ -1247,7 +1247,7 @@
           <a:p>
             <a:fld id="{F7E09A1F-48C6-4CA3-A75D-2ABD9F98254B}" type="datetimeFigureOut">
               <a:rPr lang="en-US" smtClean="0"/>
-              <a:t>9/15/2026</a:t>
+              <a:t>9/16/2026</a:t>
             </a:fld>
             <a:endParaRPr lang="en-US"/>
           </a:p>
@@ -1579,7 +1579,7 @@
           <a:p>
             <a:fld id="{F7E09A1F-48C6-4CA3-A75D-2ABD9F98254B}" type="datetimeFigureOut">
               <a:rPr lang="en-US" smtClean="0"/>
-              <a:t>9/15/2026</a:t>
+              <a:t>9/16/2026</a:t>
             </a:fld>
             <a:endParaRPr lang="en-US"/>
           </a:p>
@@ -2058,7 +2058,7 @@
           <a:p>
             <a:fld id="{F7E09A1F-48C6-4CA3-A75D-2ABD9F98254B}" type="datetimeFigureOut">
               <a:rPr lang="en-US" smtClean="0"/>
-              <a:t>9/15/2026</a:t>
+              <a:t>9/16/2026</a:t>
             </a:fld>
             <a:endParaRPr lang="en-US"/>
           </a:p>
@@ -2200,7 +2200,7 @@
           <a:p>
             <a:fld id="{F7E09A1F-48C6-4CA3-A75D-2ABD9F98254B}" type="datetimeFigureOut">
               <a:rPr lang="en-US" smtClean="0"/>
-              <a:t>9/15/2026</a:t>
+              <a:t>9/16/2026</a:t>
             </a:fld>
             <a:endParaRPr lang="en-US"/>
           </a:p>
@@ -2313,7 +2313,7 @@
           <a:p>
             <a:fld id="{F7E09A1F-48C6-4CA3-A75D-2ABD9F98254B}" type="datetimeFigureOut">
               <a:rPr lang="en-US" smtClean="0"/>
-              <a:t>9/15/2026</a:t>
+              <a:t>9/16/2026</a:t>
             </a:fld>
             <a:endParaRPr lang="en-US"/>
           </a:p>
@@ -2658,7 +2658,7 @@
           <a:p>
             <a:fld id="{F7E09A1F-48C6-4CA3-A75D-2ABD9F98254B}" type="datetimeFigureOut">
               <a:rPr lang="en-US" smtClean="0"/>
-              <a:t>9/15/2026</a:t>
+              <a:t>9/16/2026</a:t>
             </a:fld>
             <a:endParaRPr lang="en-US"/>
           </a:p>
@@ -2947,7 +2947,7 @@
           <a:p>
             <a:fld id="{F7E09A1F-48C6-4CA3-A75D-2ABD9F98254B}" type="datetimeFigureOut">
               <a:rPr lang="en-US" smtClean="0"/>
-              <a:t>9/15/2026</a:t>
+              <a:t>9/16/2026</a:t>
             </a:fld>
             <a:endParaRPr lang="en-US"/>
           </a:p>
@@ -3222,7 +3222,7 @@
           <a:p>
             <a:fld id="{F7E09A1F-48C6-4CA3-A75D-2ABD9F98254B}" type="datetimeFigureOut">
               <a:rPr lang="en-US" smtClean="0"/>
-              <a:t>9/15/2026</a:t>
+              <a:t>9/16/2026</a:t>
             </a:fld>
             <a:endParaRPr lang="en-US"/>
           </a:p>
@@ -4139,25 +4139,41 @@
             </a:r>
             <a:endParaRPr lang="en-US" altLang="ja-JP" dirty="0"/>
           </a:p>
-          <a:p>
-            <a:pPr marL="0" indent="0">
-              <a:buNone/>
-            </a:pPr>
-            <a:r>
-              <a:rPr lang="en-US" altLang="ja-JP" dirty="0"/>
-              <a:t>(</a:t>
-            </a:r>
-            <a:r>
-              <a:rPr lang="ja-JP" altLang="en-US" dirty="0"/>
-              <a:t>後々時間に余裕がある場合「出てるヤン編を制作する」。</a:t>
-            </a:r>
-            <a:r>
-              <a:rPr lang="en-US" altLang="ja-JP" dirty="0"/>
-              <a:t>)</a:t>
-            </a:r>
-          </a:p>
-        </p:txBody>
-      </p:sp>
+        </p:txBody>
+      </p:sp>
+      <p:pic>
+        <p:nvPicPr>
+          <p:cNvPr id="4" name="図 3">
+            <a:extLst>
+              <a:ext uri="{FF2B5EF4-FFF2-40B4-BE49-F238E27FC236}">
+                <a16:creationId xmlns:a16="http://schemas.microsoft.com/office/drawing/2014/main" id="{061F9439-C204-749D-BD92-E52366234502}"/>
+              </a:ext>
+              <a:ext uri="{C183D7F6-B498-43B3-948B-1728B52AA6E4}">
+                <adec:decorative xmlns:adec="http://schemas.microsoft.com/office/drawing/2017/decorative" val="1"/>
+              </a:ext>
+            </a:extLst>
+          </p:cNvPr>
+          <p:cNvPicPr>
+            <a:picLocks noChangeAspect="1"/>
+          </p:cNvPicPr>
+          <p:nvPr/>
+        </p:nvPicPr>
+        <p:blipFill>
+          <a:blip r:embed="rId2"/>
+          <a:stretch>
+            <a:fillRect/>
+          </a:stretch>
+        </p:blipFill>
+        <p:spPr>
+          <a:xfrm>
+            <a:off x="7085736" y="4294667"/>
+            <a:ext cx="4268064" cy="2399510"/>
+          </a:xfrm>
+          <a:prstGeom prst="rect">
+            <a:avLst/>
+          </a:prstGeom>
+        </p:spPr>
+      </p:pic>
     </p:spTree>
     <p:extLst>
       <p:ext uri="{BB962C8B-B14F-4D97-AF65-F5344CB8AC3E}">
@@ -4255,27 +4271,6 @@
               <a:rPr lang="ja-JP" altLang="en-US" dirty="0"/>
               <a:t>敵から攻撃を受けないように倒していく</a:t>
             </a:r>
-            <a:r>
-              <a:rPr lang="en-US" altLang="ja-JP" dirty="0"/>
-              <a:t>(</a:t>
-            </a:r>
-            <a:r>
-              <a:rPr lang="ja-JP" altLang="en-US" dirty="0"/>
-              <a:t>アイテムを実装して水ゲージを追加するかも</a:t>
-            </a:r>
-            <a:r>
-              <a:rPr lang="en-US" altLang="ja-JP" dirty="0"/>
-              <a:t>)</a:t>
-            </a:r>
-          </a:p>
-          <a:p>
-            <a:pPr marL="0" indent="0">
-              <a:buNone/>
-            </a:pPr>
-            <a:r>
-              <a:rPr lang="ja-JP" altLang="en-US" dirty="0"/>
-              <a:t>昼の状態と夜の状態で出てくる敵を変える</a:t>
-            </a:r>
             <a:endParaRPr lang="en-US" altLang="ja-JP" dirty="0"/>
           </a:p>
           <a:p>
@@ -4292,39 +4287,17 @@
               <a:rPr lang="ja-JP" altLang="en-US" dirty="0"/>
               <a:t>カメラは一人称</a:t>
             </a:r>
-            <a:r>
-              <a:rPr lang="en-US" altLang="ja-JP" dirty="0"/>
-              <a:t>(</a:t>
-            </a:r>
+            <a:endParaRPr lang="en-US" altLang="ja-JP" dirty="0"/>
+          </a:p>
+          <a:p>
+            <a:pPr marL="0" indent="0">
+              <a:buNone/>
+            </a:pPr>
             <a:r>
               <a:rPr lang="ja-JP" altLang="en-US" dirty="0"/>
-              <a:t>画面にはプレイヤーの手だけ映る状態</a:t>
-            </a:r>
-            <a:r>
-              <a:rPr lang="en-US" altLang="ja-JP" dirty="0"/>
-              <a:t>)</a:t>
-            </a:r>
-          </a:p>
-          <a:p>
-            <a:pPr marL="0" indent="0">
-              <a:buNone/>
-            </a:pPr>
-            <a:r>
-              <a:rPr lang="ja-JP" altLang="en-US" dirty="0"/>
-              <a:t>プレイヤーの攻撃は投擲物</a:t>
-            </a:r>
-            <a:r>
-              <a:rPr lang="en-US" altLang="ja-JP" dirty="0"/>
-              <a:t>(</a:t>
-            </a:r>
-            <a:r>
-              <a:rPr lang="ja-JP" altLang="en-US" dirty="0"/>
-              <a:t>中～長距離武器</a:t>
-            </a:r>
-            <a:r>
-              <a:rPr lang="en-US" altLang="ja-JP" dirty="0"/>
-              <a:t>)</a:t>
-            </a:r>
+              <a:t>プレイヤーの攻撃は銃</a:t>
+            </a:r>
+            <a:endParaRPr lang="en-US" altLang="ja-JP" dirty="0"/>
           </a:p>
         </p:txBody>
       </p:sp>
@@ -4356,6 +4329,36 @@
           </a:p>
         </p:txBody>
       </p:sp>
+      <p:pic>
+        <p:nvPicPr>
+          <p:cNvPr id="2" name="図 1" descr="スクリーンショット #29">
+            <a:extLst>
+              <a:ext uri="{FF2B5EF4-FFF2-40B4-BE49-F238E27FC236}">
+                <a16:creationId xmlns:a16="http://schemas.microsoft.com/office/drawing/2014/main" id="{75CC86E4-95A4-AFD9-3919-31C808A50D4E}"/>
+              </a:ext>
+            </a:extLst>
+          </p:cNvPr>
+          <p:cNvPicPr>
+            <a:picLocks noChangeAspect="1"/>
+          </p:cNvPicPr>
+          <p:nvPr/>
+        </p:nvPicPr>
+        <p:blipFill>
+          <a:blip r:embed="rId2"/>
+          <a:stretch>
+            <a:fillRect/>
+          </a:stretch>
+        </p:blipFill>
+        <p:spPr>
+          <a:xfrm>
+            <a:off x="5726546" y="3264331"/>
+            <a:ext cx="5024582" cy="2826327"/>
+          </a:xfrm>
+          <a:prstGeom prst="rect">
+            <a:avLst/>
+          </a:prstGeom>
+        </p:spPr>
+      </p:pic>
     </p:spTree>
     <p:extLst>
       <p:ext uri="{BB962C8B-B14F-4D97-AF65-F5344CB8AC3E}">

--- a/ヤンの三日間企画書.pptx
+++ b/ヤンの三日間企画書.pptx
@@ -4295,7 +4295,17 @@
             </a:pPr>
             <a:r>
               <a:rPr lang="ja-JP" altLang="en-US" dirty="0"/>
-              <a:t>プレイヤーの攻撃は銃</a:t>
+              <a:t>プレイヤーの攻撃は銃（無制限）</a:t>
+            </a:r>
+            <a:endParaRPr lang="en-US" altLang="ja-JP" dirty="0"/>
+          </a:p>
+          <a:p>
+            <a:pPr marL="0" indent="0">
+              <a:buNone/>
+            </a:pPr>
+            <a:r>
+              <a:rPr lang="ja-JP" altLang="en-US" dirty="0"/>
+              <a:t>操作方法はキーボード</a:t>
             </a:r>
             <a:endParaRPr lang="en-US" altLang="ja-JP" dirty="0"/>
           </a:p>
@@ -4351,8 +4361,8 @@
         </p:blipFill>
         <p:spPr>
           <a:xfrm>
-            <a:off x="5726546" y="3264331"/>
-            <a:ext cx="5024582" cy="2826327"/>
+            <a:off x="6096000" y="3472149"/>
+            <a:ext cx="4655128" cy="2618509"/>
           </a:xfrm>
           <a:prstGeom prst="rect">
             <a:avLst/>
